--- a/document/PPT/BuildFlow_AI_Presentation.pptx
+++ b/document/PPT/BuildFlow_AI_Presentation.pptx
@@ -22854,8 +22854,8 @@
         </p:nvSpPr>
         <p:spPr>
           <a:xfrm>
-            <a:off x="1919632" y="1004752"/>
-            <a:ext cx="5153340" cy="3703320"/>
+            <a:off x="1268653" y="886960"/>
+            <a:ext cx="6606692" cy="3703320"/>
           </a:xfrm>
           <a:prstGeom prst="rect">
             <a:avLst/>
@@ -22880,10 +22880,10 @@
       </p:sp>
       <p:pic>
         <p:nvPicPr>
-          <p:cNvPr id="12" name="Picture 11">
+          <p:cNvPr id="8" name="Picture 7">
             <a:extLst>
               <a:ext uri="{FF2B5EF4-FFF2-40B4-BE49-F238E27FC236}">
-                <a16:creationId xmlns:a16="http://schemas.microsoft.com/office/drawing/2014/main" id="{3B9C7585-D5A8-6322-7E01-6A7C0D3C964F}"/>
+                <a16:creationId xmlns:a16="http://schemas.microsoft.com/office/drawing/2014/main" id="{1A552683-3850-7616-A392-14397D9C806C}"/>
               </a:ext>
             </a:extLst>
           </p:cNvPr>
@@ -22893,30 +22893,19 @@
           <p:nvPr/>
         </p:nvPicPr>
         <p:blipFill>
-          <a:blip r:embed="rId3" cstate="print">
-            <a:extLst>
-              <a:ext uri="{28A0092B-C50C-407E-A947-70E740481C1C}">
-                <a14:useLocalDpi xmlns:a14="http://schemas.microsoft.com/office/drawing/2010/main" val="0"/>
-              </a:ext>
-            </a:extLst>
-          </a:blip>
-          <a:srcRect/>
+          <a:blip r:embed="rId3"/>
           <a:stretch>
             <a:fillRect/>
           </a:stretch>
         </p:blipFill>
-        <p:spPr bwMode="auto">
-          <a:xfrm>
-            <a:off x="2361695" y="1257583"/>
-            <a:ext cx="4329901" cy="3245992"/>
-          </a:xfrm>
-          <a:prstGeom prst="rect">
-            <a:avLst/>
-          </a:prstGeom>
-          <a:noFill/>
-          <a:ln>
-            <a:noFill/>
-          </a:ln>
+        <p:spPr>
+          <a:xfrm>
+            <a:off x="1532074" y="1015712"/>
+            <a:ext cx="6079851" cy="3432092"/>
+          </a:xfrm>
+          <a:prstGeom prst="rect">
+            <a:avLst/>
+          </a:prstGeom>
         </p:spPr>
       </p:pic>
     </p:spTree>
